--- a/docs/ppt/부록_x04_models.pptx
+++ b/docs/ppt/부록_x04_models.pptx
@@ -1015,7 +1015,7 @@
                 <a:ea typeface="Malgun Gothic" pitchFamily="34" charset="-122"/>
                 <a:cs typeface="Malgun Gothic" pitchFamily="34" charset="-120"/>
               </a:rPr>
-              <a:t>점 사이로 선을 긋는 네 가지 방법</a:t>
+              <a:t>흩어진 점 사이로 선을 긋는 네 가지 방법</a:t>
             </a:r>
             <a:endParaRPr lang="en-US" sz="2475" dirty="0"/>
           </a:p>
@@ -1057,7 +1057,7 @@
                 <a:ea typeface="Malgun Gothic" pitchFamily="34" charset="-122"/>
                 <a:cs typeface="Malgun Gothic" pitchFamily="34" charset="-120"/>
               </a:rPr>
-              <a:t>같은 점에 방법만 바꿔 그렸습니다. 단순한 것부터 봅니다. 점은 예시 데이터입니다.</a:t>
+              <a:t>같은 데이터를 놓고 방법만 바꿔 그렸습니다. 왼쪽이 가장 단순하고, 오른쪽으로 갈수록 정교해집니다.</a:t>
             </a:r>
             <a:endParaRPr lang="en-US" sz="1275" dirty="0"/>
           </a:p>
@@ -1202,8 +1202,8 @@
         </p:nvSpPr>
         <p:spPr>
           <a:xfrm>
-            <a:off x="8686800" y="1790700"/>
-            <a:ext cx="2705100" cy="125730"/>
+            <a:off x="7219950" y="1790700"/>
+            <a:ext cx="4171950" cy="125730"/>
           </a:xfrm>
           <a:prstGeom prst="rect">
             <a:avLst/>
@@ -1230,7 +1230,7 @@
                 <a:ea typeface="Malgun Gothic" pitchFamily="34" charset="-122"/>
                 <a:cs typeface="Malgun Gothic" pitchFamily="34" charset="-120"/>
               </a:rPr>
-              <a:t>점선 참값 · 검은 점 관측 · 연한 띠 예측 범위</a:t>
+              <a:t>예시 데이터 · 점선은 실제 값 · 검은 점은 측정값 · 연한 띠는 예측 범위</a:t>
             </a:r>
             <a:endParaRPr lang="en-US" sz="825" dirty="0"/>
           </a:p>
@@ -5666,7 +5666,7 @@
                 <a:ea typeface="Malgun Gothic" pitchFamily="34" charset="-122"/>
                 <a:cs typeface="Malgun Gothic" pitchFamily="34" charset="-120"/>
               </a:rPr>
-              <a:t>구간을 나누고 그 안의 평균을 씁니다.</a:t>
+              <a:t>구간을 나누고, 그 안의 점을 평균 냅니다.</a:t>
             </a:r>
             <a:endParaRPr lang="en-US" sz="825" dirty="0"/>
           </a:p>
@@ -5750,7 +5750,7 @@
                 <a:ea typeface="Malgun Gothic" pitchFamily="34" charset="-122"/>
                 <a:cs typeface="Malgun Gothic" pitchFamily="34" charset="-120"/>
               </a:rPr>
-              <a:t>누구나 바로 이해합니다</a:t>
+              <a:t>계산이 단순해서 설명하기 쉽습니다</a:t>
             </a:r>
             <a:endParaRPr lang="en-US" sz="788" dirty="0"/>
           </a:p>
@@ -5834,7 +5834,7 @@
                 <a:ea typeface="Malgun Gothic" pitchFamily="34" charset="-122"/>
                 <a:cs typeface="Malgun Gothic" pitchFamily="34" charset="-120"/>
               </a:rPr>
-              <a:t>경계에서 값이 튀고, 빈 구간은 답이 없습니다</a:t>
+              <a:t>구간이 바뀌면 값이 뚝 끊깁니다 · 점이 없으면 값도 없습니다</a:t>
             </a:r>
             <a:endParaRPr lang="en-US" sz="788" dirty="0"/>
           </a:p>
@@ -5941,7 +5941,7 @@
                 <a:ea typeface="Malgun Gothic" pitchFamily="34" charset="-122"/>
                 <a:cs typeface="Malgun Gothic" pitchFamily="34" charset="-120"/>
               </a:rPr>
-              <a:t>가중평균</a:t>
+              <a:t>가까운 점 위주</a:t>
             </a:r>
             <a:endParaRPr lang="en-US" sz="750" dirty="0"/>
           </a:p>
@@ -10891,7 +10891,7 @@
                 <a:ea typeface="Malgun Gothic" pitchFamily="34" charset="-122"/>
                 <a:cs typeface="Malgun Gothic" pitchFamily="34" charset="-120"/>
               </a:rPr>
-              <a:t>가까운 점일수록 무게를 크게 준 평균입니다.</a:t>
+              <a:t>가까운 점은 많이, 먼 점은 적게 반영합니다.</a:t>
             </a:r>
             <a:endParaRPr lang="en-US" sz="825" dirty="0"/>
           </a:p>
@@ -10975,7 +10975,7 @@
                 <a:ea typeface="Malgun Gothic" pitchFamily="34" charset="-122"/>
                 <a:cs typeface="Malgun Gothic" pitchFamily="34" charset="-120"/>
               </a:rPr>
-              <a:t>계단이 없어지고 부드럽습니다</a:t>
+              <a:t>선이 끊기지 않고 이어집니다</a:t>
             </a:r>
             <a:endParaRPr lang="en-US" sz="788" dirty="0"/>
           </a:p>
@@ -11059,7 +11059,7 @@
                 <a:ea typeface="Malgun Gothic" pitchFamily="34" charset="-122"/>
                 <a:cs typeface="Malgun Gothic" pitchFamily="34" charset="-120"/>
               </a:rPr>
-              <a:t>값 하나만 줍니다 · 빈 구간을 메우지 못합니다</a:t>
+              <a:t>값 하나만 나옵니다 · 그 값이 얼마나 맞는지는 알 수 없습니다</a:t>
             </a:r>
             <a:endParaRPr lang="en-US" sz="788" dirty="0"/>
           </a:p>
@@ -22716,7 +22716,7 @@
                 <a:ea typeface="Malgun Gothic" pitchFamily="34" charset="-122"/>
                 <a:cs typeface="Malgun Gothic" pitchFamily="34" charset="-120"/>
               </a:rPr>
-              <a:t>바로 옆 점만 닮았다고 봐서 점마다 각이 집니다.</a:t>
+              <a:t>바로 옆 점하고만 값이 비슷하다고 봅니다.</a:t>
             </a:r>
             <a:endParaRPr lang="en-US" sz="825" dirty="0"/>
           </a:p>
@@ -22800,7 +22800,7 @@
                 <a:ea typeface="Malgun Gothic" pitchFamily="34" charset="-122"/>
                 <a:cs typeface="Malgun Gothic" pitchFamily="34" charset="-120"/>
               </a:rPr>
-              <a:t>급한 변화를 놓치지 않습니다</a:t>
+              <a:t>값이 갑자기 변해도 따라갑니다</a:t>
             </a:r>
             <a:endParaRPr lang="en-US" sz="788" dirty="0"/>
           </a:p>
@@ -22884,7 +22884,7 @@
                 <a:ea typeface="Malgun Gothic" pitchFamily="34" charset="-122"/>
                 <a:cs typeface="Malgun Gothic" pitchFamily="34" charset="-120"/>
               </a:rPr>
-              <a:t>잡음까지 따라가 구불거립니다</a:t>
+              <a:t>튀는 값까지 따라가 선이 출렁입니다</a:t>
             </a:r>
             <a:endParaRPr lang="en-US" sz="788" dirty="0"/>
           </a:p>
@@ -34541,7 +34541,7 @@
                 <a:ea typeface="Malgun Gothic" pitchFamily="34" charset="-122"/>
                 <a:cs typeface="Malgun Gothic" pitchFamily="34" charset="-120"/>
               </a:rPr>
-              <a:t>가까운 값끼리 비슷하다고 보고 부드럽게 잇습니다.</a:t>
+              <a:t>조금 떨어진 점까지 값이 비슷하다고 봅니다.</a:t>
             </a:r>
             <a:endParaRPr lang="en-US" sz="825" dirty="0"/>
           </a:p>
@@ -34625,7 +34625,7 @@
                 <a:ea typeface="Malgun Gothic" pitchFamily="34" charset="-122"/>
                 <a:cs typeface="Malgun Gothic" pitchFamily="34" charset="-120"/>
               </a:rPr>
-              <a:t>점이 없는 구간도 자연스럽게 메웁니다</a:t>
+              <a:t>점이 없는 구간도 무리 없이 이어 줍니다</a:t>
             </a:r>
             <a:endParaRPr lang="en-US" sz="788" dirty="0"/>
           </a:p>
@@ -34709,7 +34709,7 @@
                 <a:ea typeface="Malgun Gothic" pitchFamily="34" charset="-122"/>
                 <a:cs typeface="Malgun Gothic" pitchFamily="34" charset="-120"/>
               </a:rPr>
-              <a:t>갑작스러운 꺾임은 놓칩니다</a:t>
+              <a:t>값이 갑자기 꺾이는 곳은 놓칩니다</a:t>
             </a:r>
             <a:endParaRPr lang="en-US" sz="788" dirty="0"/>
           </a:p>
@@ -34854,8 +34854,8 @@
         </p:nvSpPr>
         <p:spPr>
           <a:xfrm>
-            <a:off x="8543925" y="4933950"/>
-            <a:ext cx="2847975" cy="125730"/>
+            <a:off x="8477250" y="4933950"/>
+            <a:ext cx="2914650" cy="125730"/>
           </a:xfrm>
           <a:prstGeom prst="rect">
             <a:avLst/>
@@ -34882,7 +34882,7 @@
                 <a:ea typeface="Malgun Gothic" pitchFamily="34" charset="-122"/>
                 <a:cs typeface="Malgun Gothic" pitchFamily="34" charset="-120"/>
               </a:rPr>
-              <a:t>가우시안 프로세스 — 앞의 두 방법과 갈리는 자리</a:t>
+              <a:t>가우시안 프로세스 · 앞의 두 방법과 갈라지는 지점</a:t>
             </a:r>
             <a:endParaRPr lang="en-US" sz="825" dirty="0"/>
           </a:p>
@@ -34944,7 +34944,7 @@
                 <a:ea typeface="Malgun Gothic" pitchFamily="34" charset="-122"/>
                 <a:cs typeface="Malgun Gothic" pitchFamily="34" charset="-120"/>
               </a:rPr>
-              <a:t>곡선을 하나만 고르지 않습니다</a:t>
+              <a:t>선을 하나만 긋지 않습니다</a:t>
             </a:r>
             <a:endParaRPr lang="en-US" sz="938" dirty="0"/>
           </a:p>
@@ -34986,7 +34986,7 @@
                 <a:ea typeface="Malgun Gothic" pitchFamily="34" charset="-122"/>
                 <a:cs typeface="Malgun Gothic" pitchFamily="34" charset="-120"/>
               </a:rPr>
-              <a:t>점을 지나는 곡선을 여러 개 놓고, 그 한가운데를 답으로 냅니다.</a:t>
+              <a:t>점을 지나는 선을 여러 개 그리고, 그 평균을 답으로 냅니다.</a:t>
             </a:r>
             <a:endParaRPr lang="en-US" sz="810" dirty="0"/>
           </a:p>
@@ -35090,7 +35090,7 @@
                 <a:ea typeface="Malgun Gothic" pitchFamily="34" charset="-122"/>
                 <a:cs typeface="Malgun Gothic" pitchFamily="34" charset="-120"/>
               </a:rPr>
-              <a:t>연한 띠가 그것입니다. 앞의 두 방법에는 이 띠가 없습니다.</a:t>
+              <a:t>선이 여러 개니 위아래로 범위가 생깁니다. 그것이 연한 띠입니다.</a:t>
             </a:r>
             <a:endParaRPr lang="en-US" sz="810" dirty="0"/>
           </a:p>
@@ -35152,7 +35152,7 @@
                 <a:ea typeface="Malgun Gothic" pitchFamily="34" charset="-122"/>
                 <a:cs typeface="Malgun Gothic" pitchFamily="34" charset="-120"/>
               </a:rPr>
-              <a:t>커널이 성격을 정합니다</a:t>
+              <a:t>커널이 선의 성격을 정합니다</a:t>
             </a:r>
             <a:endParaRPr lang="en-US" sz="938" dirty="0"/>
           </a:p>
@@ -35194,7 +35194,7 @@
                 <a:ea typeface="Malgun Gothic" pitchFamily="34" charset="-122"/>
                 <a:cs typeface="Malgun Gothic" pitchFamily="34" charset="-120"/>
               </a:rPr>
-              <a:t>옆 점만 보면 각지고(지수), 멀리까지 보면 부드럽습니다(RBF).</a:t>
+              <a:t>얼마나 떨어진 점까지 비슷하게 볼지를 정하는 것이 커널입니다.</a:t>
             </a:r>
             <a:endParaRPr lang="en-US" sz="810" dirty="0"/>
           </a:p>
@@ -35323,7 +35323,7 @@
                 <a:ea typeface="Malgun Gothic" pitchFamily="34" charset="-122"/>
                 <a:cs typeface="Malgun Gothic" pitchFamily="34" charset="-120"/>
               </a:rPr>
-              <a:t>우리는 이 넷을 포함한 일곱 가지를 같은 데이터로 겨루게 해서 골랐습니다.</a:t>
+              <a:t>우리는 이 넷을 포함한 일곱 가지를 같은 데이터로 시험해 보고 골랐습니다.</a:t>
             </a:r>
             <a:endParaRPr lang="en-US" sz="1163" dirty="0"/>
           </a:p>
